--- a/lotform/TPM_2_Validaciones.pptx
+++ b/lotform/TPM_2_Validaciones.pptx
@@ -2388,7 +2388,7 @@
                 <a:latin typeface="LG스마트체 Regular" panose="020B0600000101010101" pitchFamily="50" charset="-127"/>
                 <a:ea typeface="LG스마트체 Regular" panose="020B0600000101010101" pitchFamily="50" charset="-127"/>
               </a:rPr>
-              <a:t>Install PCB - vendor software AlphaRap-SRM 1.1.0.18</a:t>
+              <a:t>Line 2 · Install PCB - vendor software AlphaRap-SRM 1.1.0.18</a:t>
             </a:r>
             <a:endParaRPr kumimoji="0" lang="en-US" altLang="ko-KR" sz="1600" b="1" i="0" strike="noStrike" kern="1200" cap="none" spc="0" normalizeH="0" baseline="0" noProof="0" dirty="0">
               <a:ln>
@@ -3173,7 +3173,7 @@
             </a:pPr>
             <a:r>
               <a:rPr lang="en-US" altLang="ko-KR" dirty="0" sz="1000"/>
-              <a:t>Pallets with position 12 unregistered: from nearly every pallet to none.</a:t>
+              <a:t>Position 12 registered on every pallet during the validation shift.</a:t>
             </a:r>
           </a:p>
         </p:txBody>
@@ -8150,7 +8150,7 @@
         </p:nvSpPr>
         <p:spPr bwMode="auto">
           <a:xfrm>
-            <a:off x="7132320" y="4370832"/>
+            <a:off x="7132320" y="4279392"/>
             <a:ext cx="2633472" cy="1463040"/>
           </a:xfrm>
           <a:prstGeom prst="rect">
@@ -8293,20 +8293,7 @@
             </a:pPr>
             <a:r>
               <a:rPr lang="en-US" altLang="ko-KR" dirty="0" sz="900"/>
-              <a:t>2 Oct: both Unloaders above 9,700 pcs; Line 1 at 20,127 pcs (+20.7%).</a:t>
-            </a:r>
-          </a:p>
-          <a:p>
-            <a:pPr algn="l" marL="171450" indent="-171450">
-              <a:spcAft>
-                <a:spcPts val="300"/>
-              </a:spcAft>
-              <a:buFont typeface="Arial"/>
-              <a:buChar char="•"/>
-            </a:pPr>
-            <a:r>
-              <a:rPr lang="en-US" altLang="ko-KR" dirty="0" sz="900"/>
-              <a:t>1 Oct: controlled material run (17,449 pcs), peak of 1,003 pcs/h.</a:t>
+              <a:t>No more pallets reaching the Unloader with an unregistered piece.</a:t>
             </a:r>
           </a:p>
           <a:p>
@@ -8320,6 +8307,19 @@
             <a:r>
               <a:rPr lang="en-US" altLang="ko-KR" dirty="0" sz="900"/>
               <a:t>1211 alarms: baseline 24-36 per 12 h shift; new figure pending.</a:t>
+            </a:r>
+          </a:p>
+          <a:p>
+            <a:pPr algn="l" marL="171450" indent="-171450">
+              <a:spcAft>
+                <a:spcPts val="300"/>
+              </a:spcAft>
+              <a:buFont typeface="Arial"/>
+              <a:buChar char="•"/>
+            </a:pPr>
+            <a:r>
+              <a:rPr lang="en-US" altLang="ko-KR" dirty="0" sz="900"/>
+              <a:t>Guards portable to the rest of the stations without changing their flowcharts.</a:t>
             </a:r>
           </a:p>
         </p:txBody>
@@ -8396,1533 +8396,6 @@
           </a:p>
         </p:txBody>
       </p:sp>
-      <p:graphicFrame>
-        <p:nvGraphicFramePr>
-          <p:cNvPr id="301" name="Production results table"/>
-          <p:cNvGraphicFramePr>
-            <a:graphicFrameLocks noGrp="1"/>
-          </p:cNvGraphicFramePr>
-          <p:nvPr/>
-        </p:nvGraphicFramePr>
-        <p:xfrm>
-          <a:off x="7187184" y="3054096"/>
-          <a:ext cx="2578608" cy="1216152"/>
-        </p:xfrm>
-        <a:graphic>
-          <a:graphicData uri="http://schemas.openxmlformats.org/drawingml/2006/table">
-            <a:tbl>
-              <a:tblPr firstRow="1"/>
-              <a:tblGrid>
-                <a:gridCol w="804672"/>
-                <a:gridCol w="429768"/>
-                <a:gridCol w="429768"/>
-                <a:gridCol w="457200"/>
-                <a:gridCol w="457200"/>
-              </a:tblGrid>
-              <a:tr h="173736">
-                <a:tc>
-                  <a:txBody>
-                    <a:bodyPr/>
-                    <a:lstStyle/>
-                    <a:p>
-                      <a:pPr algn="ctr"/>
-                      <a:r>
-                        <a:rPr lang="en-US" altLang="ko-KR" dirty="0" sz="700" b="1">
-                          <a:solidFill>
-                            <a:srgbClr val="FFFFFF"/>
-                          </a:solidFill>
-                          <a:latin typeface="Arial"/>
-                          <a:cs typeface="Arial"/>
-                        </a:rPr>
-                        <a:t>Unloader (pcs)</a:t>
-                      </a:r>
-                    </a:p>
-                  </a:txBody>
-                  <a:tcPr marL="27432" marR="27432" marT="18288" marB="18288" anchor="ctr">
-                    <a:lnL w="6350">
-                      <a:solidFill>
-                        <a:srgbClr val="BFBFBF"/>
-                      </a:solidFill>
-                    </a:lnL>
-                    <a:lnR w="6350">
-                      <a:solidFill>
-                        <a:srgbClr val="BFBFBF"/>
-                      </a:solidFill>
-                    </a:lnR>
-                    <a:lnT w="6350">
-                      <a:solidFill>
-                        <a:srgbClr val="BFBFBF"/>
-                      </a:solidFill>
-                    </a:lnT>
-                    <a:lnB w="6350">
-                      <a:solidFill>
-                        <a:srgbClr val="BFBFBF"/>
-                      </a:solidFill>
-                    </a:lnB>
-                    <a:solidFill>
-                      <a:srgbClr val="595959"/>
-                    </a:solidFill>
-                  </a:tcPr>
-                </a:tc>
-                <a:tc>
-                  <a:txBody>
-                    <a:bodyPr/>
-                    <a:lstStyle/>
-                    <a:p>
-                      <a:pPr algn="ctr"/>
-                      <a:r>
-                        <a:rPr lang="en-US" altLang="ko-KR" dirty="0" sz="700" b="1">
-                          <a:solidFill>
-                            <a:srgbClr val="FFFFFF"/>
-                          </a:solidFill>
-                          <a:latin typeface="Arial"/>
-                          <a:cs typeface="Arial"/>
-                        </a:rPr>
-                        <a:t>12 Aug</a:t>
-                      </a:r>
-                    </a:p>
-                  </a:txBody>
-                  <a:tcPr marL="27432" marR="27432" marT="18288" marB="18288" anchor="ctr">
-                    <a:lnL w="6350">
-                      <a:solidFill>
-                        <a:srgbClr val="BFBFBF"/>
-                      </a:solidFill>
-                    </a:lnL>
-                    <a:lnR w="6350">
-                      <a:solidFill>
-                        <a:srgbClr val="BFBFBF"/>
-                      </a:solidFill>
-                    </a:lnR>
-                    <a:lnT w="6350">
-                      <a:solidFill>
-                        <a:srgbClr val="BFBFBF"/>
-                      </a:solidFill>
-                    </a:lnT>
-                    <a:lnB w="6350">
-                      <a:solidFill>
-                        <a:srgbClr val="BFBFBF"/>
-                      </a:solidFill>
-                    </a:lnB>
-                    <a:solidFill>
-                      <a:srgbClr val="595959"/>
-                    </a:solidFill>
-                  </a:tcPr>
-                </a:tc>
-                <a:tc>
-                  <a:txBody>
-                    <a:bodyPr/>
-                    <a:lstStyle/>
-                    <a:p>
-                      <a:pPr algn="ctr"/>
-                      <a:r>
-                        <a:rPr lang="en-US" altLang="ko-KR" dirty="0" sz="700" b="1">
-                          <a:solidFill>
-                            <a:srgbClr val="FFFFFF"/>
-                          </a:solidFill>
-                          <a:latin typeface="Arial"/>
-                          <a:cs typeface="Arial"/>
-                        </a:rPr>
-                        <a:t>1 Oct</a:t>
-                      </a:r>
-                    </a:p>
-                  </a:txBody>
-                  <a:tcPr marL="27432" marR="27432" marT="18288" marB="18288" anchor="ctr">
-                    <a:lnL w="6350">
-                      <a:solidFill>
-                        <a:srgbClr val="BFBFBF"/>
-                      </a:solidFill>
-                    </a:lnL>
-                    <a:lnR w="6350">
-                      <a:solidFill>
-                        <a:srgbClr val="BFBFBF"/>
-                      </a:solidFill>
-                    </a:lnR>
-                    <a:lnT w="6350">
-                      <a:solidFill>
-                        <a:srgbClr val="BFBFBF"/>
-                      </a:solidFill>
-                    </a:lnT>
-                    <a:lnB w="6350">
-                      <a:solidFill>
-                        <a:srgbClr val="BFBFBF"/>
-                      </a:solidFill>
-                    </a:lnB>
-                    <a:solidFill>
-                      <a:srgbClr val="595959"/>
-                    </a:solidFill>
-                  </a:tcPr>
-                </a:tc>
-                <a:tc>
-                  <a:txBody>
-                    <a:bodyPr/>
-                    <a:lstStyle/>
-                    <a:p>
-                      <a:pPr algn="ctr"/>
-                      <a:r>
-                        <a:rPr lang="en-US" altLang="ko-KR" dirty="0" sz="700" b="1">
-                          <a:solidFill>
-                            <a:srgbClr val="FFFFFF"/>
-                          </a:solidFill>
-                          <a:latin typeface="Arial"/>
-                          <a:cs typeface="Arial"/>
-                        </a:rPr>
-                        <a:t>2 Oct</a:t>
-                      </a:r>
-                    </a:p>
-                  </a:txBody>
-                  <a:tcPr marL="27432" marR="27432" marT="18288" marB="18288" anchor="ctr">
-                    <a:lnL w="6350">
-                      <a:solidFill>
-                        <a:srgbClr val="BFBFBF"/>
-                      </a:solidFill>
-                    </a:lnL>
-                    <a:lnR w="6350">
-                      <a:solidFill>
-                        <a:srgbClr val="BFBFBF"/>
-                      </a:solidFill>
-                    </a:lnR>
-                    <a:lnT w="6350">
-                      <a:solidFill>
-                        <a:srgbClr val="BFBFBF"/>
-                      </a:solidFill>
-                    </a:lnT>
-                    <a:lnB w="6350">
-                      <a:solidFill>
-                        <a:srgbClr val="BFBFBF"/>
-                      </a:solidFill>
-                    </a:lnB>
-                    <a:solidFill>
-                      <a:srgbClr val="595959"/>
-                    </a:solidFill>
-                  </a:tcPr>
-                </a:tc>
-                <a:tc>
-                  <a:txBody>
-                    <a:bodyPr/>
-                    <a:lstStyle/>
-                    <a:p>
-                      <a:pPr algn="ctr"/>
-                      <a:r>
-                        <a:rPr lang="en-US" altLang="ko-KR" dirty="0" sz="700" b="1">
-                          <a:solidFill>
-                            <a:srgbClr val="FFFFFF"/>
-                          </a:solidFill>
-                          <a:latin typeface="Arial"/>
-                          <a:cs typeface="Arial"/>
-                        </a:rPr>
-                        <a:t>Δ</a:t>
-                      </a:r>
-                    </a:p>
-                  </a:txBody>
-                  <a:tcPr marL="27432" marR="27432" marT="18288" marB="18288" anchor="ctr">
-                    <a:lnL w="6350">
-                      <a:solidFill>
-                        <a:srgbClr val="BFBFBF"/>
-                      </a:solidFill>
-                    </a:lnL>
-                    <a:lnR w="6350">
-                      <a:solidFill>
-                        <a:srgbClr val="BFBFBF"/>
-                      </a:solidFill>
-                    </a:lnR>
-                    <a:lnT w="6350">
-                      <a:solidFill>
-                        <a:srgbClr val="BFBFBF"/>
-                      </a:solidFill>
-                    </a:lnT>
-                    <a:lnB w="6350">
-                      <a:solidFill>
-                        <a:srgbClr val="BFBFBF"/>
-                      </a:solidFill>
-                    </a:lnB>
-                    <a:solidFill>
-                      <a:srgbClr val="595959"/>
-                    </a:solidFill>
-                  </a:tcPr>
-                </a:tc>
-              </a:tr>
-              <a:tr h="173736">
-                <a:tc>
-                  <a:txBody>
-                    <a:bodyPr/>
-                    <a:lstStyle/>
-                    <a:p>
-                      <a:pPr algn="l"/>
-                      <a:r>
-                        <a:rPr lang="en-US" altLang="ko-KR" dirty="0" sz="700">
-                          <a:solidFill>
-                            <a:srgbClr val="262626"/>
-                          </a:solidFill>
-                          <a:latin typeface="Arial"/>
-                          <a:cs typeface="Arial"/>
-                        </a:rPr>
-                        <a:t>#01 per day</a:t>
-                      </a:r>
-                    </a:p>
-                  </a:txBody>
-                  <a:tcPr marL="27432" marR="27432" marT="18288" marB="18288" anchor="ctr">
-                    <a:lnL w="6350">
-                      <a:solidFill>
-                        <a:srgbClr val="BFBFBF"/>
-                      </a:solidFill>
-                    </a:lnL>
-                    <a:lnR w="6350">
-                      <a:solidFill>
-                        <a:srgbClr val="BFBFBF"/>
-                      </a:solidFill>
-                    </a:lnR>
-                    <a:lnT w="6350">
-                      <a:solidFill>
-                        <a:srgbClr val="BFBFBF"/>
-                      </a:solidFill>
-                    </a:lnT>
-                    <a:lnB w="6350">
-                      <a:solidFill>
-                        <a:srgbClr val="BFBFBF"/>
-                      </a:solidFill>
-                    </a:lnB>
-                    <a:solidFill>
-                      <a:srgbClr val="F2F2F2"/>
-                    </a:solidFill>
-                  </a:tcPr>
-                </a:tc>
-                <a:tc>
-                  <a:txBody>
-                    <a:bodyPr/>
-                    <a:lstStyle/>
-                    <a:p>
-                      <a:pPr algn="ctr"/>
-                      <a:r>
-                        <a:rPr lang="en-US" altLang="ko-KR" dirty="0" sz="700">
-                          <a:solidFill>
-                            <a:srgbClr val="262626"/>
-                          </a:solidFill>
-                          <a:latin typeface="Arial"/>
-                          <a:cs typeface="Arial"/>
-                        </a:rPr>
-                        <a:t>7,881</a:t>
-                      </a:r>
-                    </a:p>
-                  </a:txBody>
-                  <a:tcPr marL="27432" marR="27432" marT="18288" marB="18288" anchor="ctr">
-                    <a:lnL w="6350">
-                      <a:solidFill>
-                        <a:srgbClr val="BFBFBF"/>
-                      </a:solidFill>
-                    </a:lnL>
-                    <a:lnR w="6350">
-                      <a:solidFill>
-                        <a:srgbClr val="BFBFBF"/>
-                      </a:solidFill>
-                    </a:lnR>
-                    <a:lnT w="6350">
-                      <a:solidFill>
-                        <a:srgbClr val="BFBFBF"/>
-                      </a:solidFill>
-                    </a:lnT>
-                    <a:lnB w="6350">
-                      <a:solidFill>
-                        <a:srgbClr val="BFBFBF"/>
-                      </a:solidFill>
-                    </a:lnB>
-                  </a:tcPr>
-                </a:tc>
-                <a:tc>
-                  <a:txBody>
-                    <a:bodyPr/>
-                    <a:lstStyle/>
-                    <a:p>
-                      <a:pPr algn="ctr"/>
-                      <a:r>
-                        <a:rPr lang="en-US" altLang="ko-KR" dirty="0" sz="700">
-                          <a:solidFill>
-                            <a:srgbClr val="262626"/>
-                          </a:solidFill>
-                          <a:latin typeface="Arial"/>
-                          <a:cs typeface="Arial"/>
-                        </a:rPr>
-                        <a:t>9,418</a:t>
-                      </a:r>
-                    </a:p>
-                  </a:txBody>
-                  <a:tcPr marL="27432" marR="27432" marT="18288" marB="18288" anchor="ctr">
-                    <a:lnL w="6350">
-                      <a:solidFill>
-                        <a:srgbClr val="BFBFBF"/>
-                      </a:solidFill>
-                    </a:lnL>
-                    <a:lnR w="6350">
-                      <a:solidFill>
-                        <a:srgbClr val="BFBFBF"/>
-                      </a:solidFill>
-                    </a:lnR>
-                    <a:lnT w="6350">
-                      <a:solidFill>
-                        <a:srgbClr val="BFBFBF"/>
-                      </a:solidFill>
-                    </a:lnT>
-                    <a:lnB w="6350">
-                      <a:solidFill>
-                        <a:srgbClr val="BFBFBF"/>
-                      </a:solidFill>
-                    </a:lnB>
-                  </a:tcPr>
-                </a:tc>
-                <a:tc>
-                  <a:txBody>
-                    <a:bodyPr/>
-                    <a:lstStyle/>
-                    <a:p>
-                      <a:pPr algn="ctr"/>
-                      <a:r>
-                        <a:rPr lang="en-US" altLang="ko-KR" dirty="0" sz="700" b="1">
-                          <a:solidFill>
-                            <a:srgbClr val="262626"/>
-                          </a:solidFill>
-                          <a:latin typeface="Arial"/>
-                          <a:cs typeface="Arial"/>
-                        </a:rPr>
-                        <a:t>9,725</a:t>
-                      </a:r>
-                    </a:p>
-                  </a:txBody>
-                  <a:tcPr marL="27432" marR="27432" marT="18288" marB="18288" anchor="ctr">
-                    <a:lnL w="6350">
-                      <a:solidFill>
-                        <a:srgbClr val="BFBFBF"/>
-                      </a:solidFill>
-                    </a:lnL>
-                    <a:lnR w="6350">
-                      <a:solidFill>
-                        <a:srgbClr val="BFBFBF"/>
-                      </a:solidFill>
-                    </a:lnR>
-                    <a:lnT w="6350">
-                      <a:solidFill>
-                        <a:srgbClr val="BFBFBF"/>
-                      </a:solidFill>
-                    </a:lnT>
-                    <a:lnB w="6350">
-                      <a:solidFill>
-                        <a:srgbClr val="BFBFBF"/>
-                      </a:solidFill>
-                    </a:lnB>
-                    <a:solidFill>
-                      <a:srgbClr val="EAF3EC"/>
-                    </a:solidFill>
-                  </a:tcPr>
-                </a:tc>
-                <a:tc>
-                  <a:txBody>
-                    <a:bodyPr/>
-                    <a:lstStyle/>
-                    <a:p>
-                      <a:pPr algn="ctr"/>
-                      <a:r>
-                        <a:rPr lang="en-US" altLang="ko-KR" dirty="0" sz="700" b="1">
-                          <a:solidFill>
-                            <a:srgbClr val="00703C"/>
-                          </a:solidFill>
-                          <a:latin typeface="Arial"/>
-                          <a:cs typeface="Arial"/>
-                        </a:rPr>
-                        <a:t>+23.4%</a:t>
-                      </a:r>
-                    </a:p>
-                  </a:txBody>
-                  <a:tcPr marL="27432" marR="27432" marT="18288" marB="18288" anchor="ctr">
-                    <a:lnL w="6350">
-                      <a:solidFill>
-                        <a:srgbClr val="BFBFBF"/>
-                      </a:solidFill>
-                    </a:lnL>
-                    <a:lnR w="6350">
-                      <a:solidFill>
-                        <a:srgbClr val="BFBFBF"/>
-                      </a:solidFill>
-                    </a:lnR>
-                    <a:lnT w="6350">
-                      <a:solidFill>
-                        <a:srgbClr val="BFBFBF"/>
-                      </a:solidFill>
-                    </a:lnT>
-                    <a:lnB w="6350">
-                      <a:solidFill>
-                        <a:srgbClr val="BFBFBF"/>
-                      </a:solidFill>
-                    </a:lnB>
-                  </a:tcPr>
-                </a:tc>
-              </a:tr>
-              <a:tr h="173736">
-                <a:tc>
-                  <a:txBody>
-                    <a:bodyPr/>
-                    <a:lstStyle/>
-                    <a:p>
-                      <a:pPr algn="l"/>
-                      <a:r>
-                        <a:rPr lang="en-US" altLang="ko-KR" dirty="0" sz="700">
-                          <a:solidFill>
-                            <a:srgbClr val="262626"/>
-                          </a:solidFill>
-                          <a:latin typeface="Arial"/>
-                          <a:cs typeface="Arial"/>
-                        </a:rPr>
-                        <a:t>#01 rate/h*</a:t>
-                      </a:r>
-                    </a:p>
-                  </a:txBody>
-                  <a:tcPr marL="27432" marR="27432" marT="18288" marB="18288" anchor="ctr">
-                    <a:lnL w="6350">
-                      <a:solidFill>
-                        <a:srgbClr val="BFBFBF"/>
-                      </a:solidFill>
-                    </a:lnL>
-                    <a:lnR w="6350">
-                      <a:solidFill>
-                        <a:srgbClr val="BFBFBF"/>
-                      </a:solidFill>
-                    </a:lnR>
-                    <a:lnT w="6350">
-                      <a:solidFill>
-                        <a:srgbClr val="BFBFBF"/>
-                      </a:solidFill>
-                    </a:lnT>
-                    <a:lnB w="6350">
-                      <a:solidFill>
-                        <a:srgbClr val="BFBFBF"/>
-                      </a:solidFill>
-                    </a:lnB>
-                    <a:solidFill>
-                      <a:srgbClr val="F2F2F2"/>
-                    </a:solidFill>
-                  </a:tcPr>
-                </a:tc>
-                <a:tc>
-                  <a:txBody>
-                    <a:bodyPr/>
-                    <a:lstStyle/>
-                    <a:p>
-                      <a:pPr algn="ctr"/>
-                      <a:r>
-                        <a:rPr lang="en-US" altLang="ko-KR" dirty="0" sz="700">
-                          <a:solidFill>
-                            <a:srgbClr val="262626"/>
-                          </a:solidFill>
-                          <a:latin typeface="Arial"/>
-                          <a:cs typeface="Arial"/>
-                        </a:rPr>
-                        <a:t>372.1</a:t>
-                      </a:r>
-                    </a:p>
-                  </a:txBody>
-                  <a:tcPr marL="27432" marR="27432" marT="18288" marB="18288" anchor="ctr">
-                    <a:lnL w="6350">
-                      <a:solidFill>
-                        <a:srgbClr val="BFBFBF"/>
-                      </a:solidFill>
-                    </a:lnL>
-                    <a:lnR w="6350">
-                      <a:solidFill>
-                        <a:srgbClr val="BFBFBF"/>
-                      </a:solidFill>
-                    </a:lnR>
-                    <a:lnT w="6350">
-                      <a:solidFill>
-                        <a:srgbClr val="BFBFBF"/>
-                      </a:solidFill>
-                    </a:lnT>
-                    <a:lnB w="6350">
-                      <a:solidFill>
-                        <a:srgbClr val="BFBFBF"/>
-                      </a:solidFill>
-                    </a:lnB>
-                  </a:tcPr>
-                </a:tc>
-                <a:tc>
-                  <a:txBody>
-                    <a:bodyPr/>
-                    <a:lstStyle/>
-                    <a:p>
-                      <a:pPr algn="ctr"/>
-                      <a:r>
-                        <a:rPr lang="en-US" altLang="ko-KR" dirty="0" sz="700">
-                          <a:solidFill>
-                            <a:srgbClr val="262626"/>
-                          </a:solidFill>
-                          <a:latin typeface="Arial"/>
-                          <a:cs typeface="Arial"/>
-                        </a:rPr>
-                        <a:t>409.1</a:t>
-                      </a:r>
-                    </a:p>
-                  </a:txBody>
-                  <a:tcPr marL="27432" marR="27432" marT="18288" marB="18288" anchor="ctr">
-                    <a:lnL w="6350">
-                      <a:solidFill>
-                        <a:srgbClr val="BFBFBF"/>
-                      </a:solidFill>
-                    </a:lnL>
-                    <a:lnR w="6350">
-                      <a:solidFill>
-                        <a:srgbClr val="BFBFBF"/>
-                      </a:solidFill>
-                    </a:lnR>
-                    <a:lnT w="6350">
-                      <a:solidFill>
-                        <a:srgbClr val="BFBFBF"/>
-                      </a:solidFill>
-                    </a:lnT>
-                    <a:lnB w="6350">
-                      <a:solidFill>
-                        <a:srgbClr val="BFBFBF"/>
-                      </a:solidFill>
-                    </a:lnB>
-                  </a:tcPr>
-                </a:tc>
-                <a:tc>
-                  <a:txBody>
-                    <a:bodyPr/>
-                    <a:lstStyle/>
-                    <a:p>
-                      <a:pPr algn="ctr"/>
-                      <a:r>
-                        <a:rPr lang="en-US" altLang="ko-KR" dirty="0" sz="700" b="1">
-                          <a:solidFill>
-                            <a:srgbClr val="262626"/>
-                          </a:solidFill>
-                          <a:latin typeface="Arial"/>
-                          <a:cs typeface="Arial"/>
-                        </a:rPr>
-                        <a:t>412.2</a:t>
-                      </a:r>
-                    </a:p>
-                  </a:txBody>
-                  <a:tcPr marL="27432" marR="27432" marT="18288" marB="18288" anchor="ctr">
-                    <a:lnL w="6350">
-                      <a:solidFill>
-                        <a:srgbClr val="BFBFBF"/>
-                      </a:solidFill>
-                    </a:lnL>
-                    <a:lnR w="6350">
-                      <a:solidFill>
-                        <a:srgbClr val="BFBFBF"/>
-                      </a:solidFill>
-                    </a:lnR>
-                    <a:lnT w="6350">
-                      <a:solidFill>
-                        <a:srgbClr val="BFBFBF"/>
-                      </a:solidFill>
-                    </a:lnT>
-                    <a:lnB w="6350">
-                      <a:solidFill>
-                        <a:srgbClr val="BFBFBF"/>
-                      </a:solidFill>
-                    </a:lnB>
-                    <a:solidFill>
-                      <a:srgbClr val="EAF3EC"/>
-                    </a:solidFill>
-                  </a:tcPr>
-                </a:tc>
-                <a:tc>
-                  <a:txBody>
-                    <a:bodyPr/>
-                    <a:lstStyle/>
-                    <a:p>
-                      <a:pPr algn="ctr"/>
-                      <a:r>
-                        <a:rPr lang="en-US" altLang="ko-KR" dirty="0" sz="700" b="1">
-                          <a:solidFill>
-                            <a:srgbClr val="00703C"/>
-                          </a:solidFill>
-                          <a:latin typeface="Arial"/>
-                          <a:cs typeface="Arial"/>
-                        </a:rPr>
-                        <a:t>+10.8%</a:t>
-                      </a:r>
-                    </a:p>
-                  </a:txBody>
-                  <a:tcPr marL="27432" marR="27432" marT="18288" marB="18288" anchor="ctr">
-                    <a:lnL w="6350">
-                      <a:solidFill>
-                        <a:srgbClr val="BFBFBF"/>
-                      </a:solidFill>
-                    </a:lnL>
-                    <a:lnR w="6350">
-                      <a:solidFill>
-                        <a:srgbClr val="BFBFBF"/>
-                      </a:solidFill>
-                    </a:lnR>
-                    <a:lnT w="6350">
-                      <a:solidFill>
-                        <a:srgbClr val="BFBFBF"/>
-                      </a:solidFill>
-                    </a:lnT>
-                    <a:lnB w="6350">
-                      <a:solidFill>
-                        <a:srgbClr val="BFBFBF"/>
-                      </a:solidFill>
-                    </a:lnB>
-                  </a:tcPr>
-                </a:tc>
-              </a:tr>
-              <a:tr h="173736">
-                <a:tc>
-                  <a:txBody>
-                    <a:bodyPr/>
-                    <a:lstStyle/>
-                    <a:p>
-                      <a:pPr algn="l"/>
-                      <a:r>
-                        <a:rPr lang="en-US" altLang="ko-KR" dirty="0" sz="700">
-                          <a:solidFill>
-                            <a:srgbClr val="262626"/>
-                          </a:solidFill>
-                          <a:latin typeface="Arial"/>
-                          <a:cs typeface="Arial"/>
-                        </a:rPr>
-                        <a:t>#01 stop hours</a:t>
-                      </a:r>
-                    </a:p>
-                  </a:txBody>
-                  <a:tcPr marL="27432" marR="27432" marT="18288" marB="18288" anchor="ctr">
-                    <a:lnL w="6350">
-                      <a:solidFill>
-                        <a:srgbClr val="BFBFBF"/>
-                      </a:solidFill>
-                    </a:lnL>
-                    <a:lnR w="6350">
-                      <a:solidFill>
-                        <a:srgbClr val="BFBFBF"/>
-                      </a:solidFill>
-                    </a:lnR>
-                    <a:lnT w="6350">
-                      <a:solidFill>
-                        <a:srgbClr val="BFBFBF"/>
-                      </a:solidFill>
-                    </a:lnT>
-                    <a:lnB w="6350">
-                      <a:solidFill>
-                        <a:srgbClr val="BFBFBF"/>
-                      </a:solidFill>
-                    </a:lnB>
-                    <a:solidFill>
-                      <a:srgbClr val="F2F2F2"/>
-                    </a:solidFill>
-                  </a:tcPr>
-                </a:tc>
-                <a:tc>
-                  <a:txBody>
-                    <a:bodyPr/>
-                    <a:lstStyle/>
-                    <a:p>
-                      <a:pPr algn="ctr"/>
-                      <a:r>
-                        <a:rPr lang="en-US" altLang="ko-KR" dirty="0" sz="700">
-                          <a:solidFill>
-                            <a:srgbClr val="262626"/>
-                          </a:solidFill>
-                          <a:latin typeface="Arial"/>
-                          <a:cs typeface="Arial"/>
-                        </a:rPr>
-                        <a:t>4</a:t>
-                      </a:r>
-                    </a:p>
-                  </a:txBody>
-                  <a:tcPr marL="27432" marR="27432" marT="18288" marB="18288" anchor="ctr">
-                    <a:lnL w="6350">
-                      <a:solidFill>
-                        <a:srgbClr val="BFBFBF"/>
-                      </a:solidFill>
-                    </a:lnL>
-                    <a:lnR w="6350">
-                      <a:solidFill>
-                        <a:srgbClr val="BFBFBF"/>
-                      </a:solidFill>
-                    </a:lnR>
-                    <a:lnT w="6350">
-                      <a:solidFill>
-                        <a:srgbClr val="BFBFBF"/>
-                      </a:solidFill>
-                    </a:lnT>
-                    <a:lnB w="6350">
-                      <a:solidFill>
-                        <a:srgbClr val="BFBFBF"/>
-                      </a:solidFill>
-                    </a:lnB>
-                  </a:tcPr>
-                </a:tc>
-                <a:tc>
-                  <a:txBody>
-                    <a:bodyPr/>
-                    <a:lstStyle/>
-                    <a:p>
-                      <a:pPr algn="ctr"/>
-                      <a:r>
-                        <a:rPr lang="en-US" altLang="ko-KR" dirty="0" sz="700">
-                          <a:solidFill>
-                            <a:srgbClr val="262626"/>
-                          </a:solidFill>
-                          <a:latin typeface="Arial"/>
-                          <a:cs typeface="Arial"/>
-                        </a:rPr>
-                        <a:t>2</a:t>
-                      </a:r>
-                    </a:p>
-                  </a:txBody>
-                  <a:tcPr marL="27432" marR="27432" marT="18288" marB="18288" anchor="ctr">
-                    <a:lnL w="6350">
-                      <a:solidFill>
-                        <a:srgbClr val="BFBFBF"/>
-                      </a:solidFill>
-                    </a:lnL>
-                    <a:lnR w="6350">
-                      <a:solidFill>
-                        <a:srgbClr val="BFBFBF"/>
-                      </a:solidFill>
-                    </a:lnR>
-                    <a:lnT w="6350">
-                      <a:solidFill>
-                        <a:srgbClr val="BFBFBF"/>
-                      </a:solidFill>
-                    </a:lnT>
-                    <a:lnB w="6350">
-                      <a:solidFill>
-                        <a:srgbClr val="BFBFBF"/>
-                      </a:solidFill>
-                    </a:lnB>
-                  </a:tcPr>
-                </a:tc>
-                <a:tc>
-                  <a:txBody>
-                    <a:bodyPr/>
-                    <a:lstStyle/>
-                    <a:p>
-                      <a:pPr algn="ctr"/>
-                      <a:r>
-                        <a:rPr lang="en-US" altLang="ko-KR" dirty="0" sz="700" b="1">
-                          <a:solidFill>
-                            <a:srgbClr val="262626"/>
-                          </a:solidFill>
-                          <a:latin typeface="Arial"/>
-                          <a:cs typeface="Arial"/>
-                        </a:rPr>
-                        <a:t>1</a:t>
-                      </a:r>
-                    </a:p>
-                  </a:txBody>
-                  <a:tcPr marL="27432" marR="27432" marT="18288" marB="18288" anchor="ctr">
-                    <a:lnL w="6350">
-                      <a:solidFill>
-                        <a:srgbClr val="BFBFBF"/>
-                      </a:solidFill>
-                    </a:lnL>
-                    <a:lnR w="6350">
-                      <a:solidFill>
-                        <a:srgbClr val="BFBFBF"/>
-                      </a:solidFill>
-                    </a:lnR>
-                    <a:lnT w="6350">
-                      <a:solidFill>
-                        <a:srgbClr val="BFBFBF"/>
-                      </a:solidFill>
-                    </a:lnT>
-                    <a:lnB w="6350">
-                      <a:solidFill>
-                        <a:srgbClr val="BFBFBF"/>
-                      </a:solidFill>
-                    </a:lnB>
-                    <a:solidFill>
-                      <a:srgbClr val="EAF3EC"/>
-                    </a:solidFill>
-                  </a:tcPr>
-                </a:tc>
-                <a:tc>
-                  <a:txBody>
-                    <a:bodyPr/>
-                    <a:lstStyle/>
-                    <a:p>
-                      <a:pPr algn="ctr"/>
-                      <a:r>
-                        <a:rPr lang="en-US" altLang="ko-KR" dirty="0" sz="700" b="1">
-                          <a:solidFill>
-                            <a:srgbClr val="00703C"/>
-                          </a:solidFill>
-                          <a:latin typeface="Arial"/>
-                          <a:cs typeface="Arial"/>
-                        </a:rPr>
-                        <a:t>-3</a:t>
-                      </a:r>
-                    </a:p>
-                  </a:txBody>
-                  <a:tcPr marL="27432" marR="27432" marT="18288" marB="18288" anchor="ctr">
-                    <a:lnL w="6350">
-                      <a:solidFill>
-                        <a:srgbClr val="BFBFBF"/>
-                      </a:solidFill>
-                    </a:lnL>
-                    <a:lnR w="6350">
-                      <a:solidFill>
-                        <a:srgbClr val="BFBFBF"/>
-                      </a:solidFill>
-                    </a:lnR>
-                    <a:lnT w="6350">
-                      <a:solidFill>
-                        <a:srgbClr val="BFBFBF"/>
-                      </a:solidFill>
-                    </a:lnT>
-                    <a:lnB w="6350">
-                      <a:solidFill>
-                        <a:srgbClr val="BFBFBF"/>
-                      </a:solidFill>
-                    </a:lnB>
-                  </a:tcPr>
-                </a:tc>
-              </a:tr>
-              <a:tr h="173736">
-                <a:tc>
-                  <a:txBody>
-                    <a:bodyPr/>
-                    <a:lstStyle/>
-                    <a:p>
-                      <a:pPr algn="l"/>
-                      <a:r>
-                        <a:rPr lang="en-US" altLang="ko-KR" dirty="0" sz="700">
-                          <a:solidFill>
-                            <a:srgbClr val="262626"/>
-                          </a:solidFill>
-                          <a:latin typeface="Arial"/>
-                          <a:cs typeface="Arial"/>
-                        </a:rPr>
-                        <a:t>#02 per day</a:t>
-                      </a:r>
-                    </a:p>
-                  </a:txBody>
-                  <a:tcPr marL="27432" marR="27432" marT="18288" marB="18288" anchor="ctr">
-                    <a:lnL w="6350">
-                      <a:solidFill>
-                        <a:srgbClr val="BFBFBF"/>
-                      </a:solidFill>
-                    </a:lnL>
-                    <a:lnR w="6350">
-                      <a:solidFill>
-                        <a:srgbClr val="BFBFBF"/>
-                      </a:solidFill>
-                    </a:lnR>
-                    <a:lnT w="6350">
-                      <a:solidFill>
-                        <a:srgbClr val="BFBFBF"/>
-                      </a:solidFill>
-                    </a:lnT>
-                    <a:lnB w="6350">
-                      <a:solidFill>
-                        <a:srgbClr val="BFBFBF"/>
-                      </a:solidFill>
-                    </a:lnB>
-                    <a:solidFill>
-                      <a:srgbClr val="F2F2F2"/>
-                    </a:solidFill>
-                  </a:tcPr>
-                </a:tc>
-                <a:tc>
-                  <a:txBody>
-                    <a:bodyPr/>
-                    <a:lstStyle/>
-                    <a:p>
-                      <a:pPr algn="ctr"/>
-                      <a:r>
-                        <a:rPr lang="en-US" altLang="ko-KR" dirty="0" sz="700">
-                          <a:solidFill>
-                            <a:srgbClr val="262626"/>
-                          </a:solidFill>
-                          <a:latin typeface="Arial"/>
-                          <a:cs typeface="Arial"/>
-                        </a:rPr>
-                        <a:t>8,797</a:t>
-                      </a:r>
-                    </a:p>
-                  </a:txBody>
-                  <a:tcPr marL="27432" marR="27432" marT="18288" marB="18288" anchor="ctr">
-                    <a:lnL w="6350">
-                      <a:solidFill>
-                        <a:srgbClr val="BFBFBF"/>
-                      </a:solidFill>
-                    </a:lnL>
-                    <a:lnR w="6350">
-                      <a:solidFill>
-                        <a:srgbClr val="BFBFBF"/>
-                      </a:solidFill>
-                    </a:lnR>
-                    <a:lnT w="6350">
-                      <a:solidFill>
-                        <a:srgbClr val="BFBFBF"/>
-                      </a:solidFill>
-                    </a:lnT>
-                    <a:lnB w="6350">
-                      <a:solidFill>
-                        <a:srgbClr val="BFBFBF"/>
-                      </a:solidFill>
-                    </a:lnB>
-                  </a:tcPr>
-                </a:tc>
-                <a:tc>
-                  <a:txBody>
-                    <a:bodyPr/>
-                    <a:lstStyle/>
-                    <a:p>
-                      <a:pPr algn="ctr"/>
-                      <a:r>
-                        <a:rPr lang="en-US" altLang="ko-KR" dirty="0" sz="700">
-                          <a:solidFill>
-                            <a:srgbClr val="262626"/>
-                          </a:solidFill>
-                          <a:latin typeface="Arial"/>
-                          <a:cs typeface="Arial"/>
-                        </a:rPr>
-                        <a:t>8,031</a:t>
-                      </a:r>
-                    </a:p>
-                  </a:txBody>
-                  <a:tcPr marL="27432" marR="27432" marT="18288" marB="18288" anchor="ctr">
-                    <a:lnL w="6350">
-                      <a:solidFill>
-                        <a:srgbClr val="BFBFBF"/>
-                      </a:solidFill>
-                    </a:lnL>
-                    <a:lnR w="6350">
-                      <a:solidFill>
-                        <a:srgbClr val="BFBFBF"/>
-                      </a:solidFill>
-                    </a:lnR>
-                    <a:lnT w="6350">
-                      <a:solidFill>
-                        <a:srgbClr val="BFBFBF"/>
-                      </a:solidFill>
-                    </a:lnT>
-                    <a:lnB w="6350">
-                      <a:solidFill>
-                        <a:srgbClr val="BFBFBF"/>
-                      </a:solidFill>
-                    </a:lnB>
-                  </a:tcPr>
-                </a:tc>
-                <a:tc>
-                  <a:txBody>
-                    <a:bodyPr/>
-                    <a:lstStyle/>
-                    <a:p>
-                      <a:pPr algn="ctr"/>
-                      <a:r>
-                        <a:rPr lang="en-US" altLang="ko-KR" dirty="0" sz="700" b="1">
-                          <a:solidFill>
-                            <a:srgbClr val="262626"/>
-                          </a:solidFill>
-                          <a:latin typeface="Arial"/>
-                          <a:cs typeface="Arial"/>
-                        </a:rPr>
-                        <a:t>10,402</a:t>
-                      </a:r>
-                    </a:p>
-                  </a:txBody>
-                  <a:tcPr marL="27432" marR="27432" marT="18288" marB="18288" anchor="ctr">
-                    <a:lnL w="6350">
-                      <a:solidFill>
-                        <a:srgbClr val="BFBFBF"/>
-                      </a:solidFill>
-                    </a:lnL>
-                    <a:lnR w="6350">
-                      <a:solidFill>
-                        <a:srgbClr val="BFBFBF"/>
-                      </a:solidFill>
-                    </a:lnR>
-                    <a:lnT w="6350">
-                      <a:solidFill>
-                        <a:srgbClr val="BFBFBF"/>
-                      </a:solidFill>
-                    </a:lnT>
-                    <a:lnB w="6350">
-                      <a:solidFill>
-                        <a:srgbClr val="BFBFBF"/>
-                      </a:solidFill>
-                    </a:lnB>
-                    <a:solidFill>
-                      <a:srgbClr val="EAF3EC"/>
-                    </a:solidFill>
-                  </a:tcPr>
-                </a:tc>
-                <a:tc>
-                  <a:txBody>
-                    <a:bodyPr/>
-                    <a:lstStyle/>
-                    <a:p>
-                      <a:pPr algn="ctr"/>
-                      <a:r>
-                        <a:rPr lang="en-US" altLang="ko-KR" dirty="0" sz="700" b="1">
-                          <a:solidFill>
-                            <a:srgbClr val="00703C"/>
-                          </a:solidFill>
-                          <a:latin typeface="Arial"/>
-                          <a:cs typeface="Arial"/>
-                        </a:rPr>
-                        <a:t>+18.2%</a:t>
-                      </a:r>
-                    </a:p>
-                  </a:txBody>
-                  <a:tcPr marL="27432" marR="27432" marT="18288" marB="18288" anchor="ctr">
-                    <a:lnL w="6350">
-                      <a:solidFill>
-                        <a:srgbClr val="BFBFBF"/>
-                      </a:solidFill>
-                    </a:lnL>
-                    <a:lnR w="6350">
-                      <a:solidFill>
-                        <a:srgbClr val="BFBFBF"/>
-                      </a:solidFill>
-                    </a:lnR>
-                    <a:lnT w="6350">
-                      <a:solidFill>
-                        <a:srgbClr val="BFBFBF"/>
-                      </a:solidFill>
-                    </a:lnT>
-                    <a:lnB w="6350">
-                      <a:solidFill>
-                        <a:srgbClr val="BFBFBF"/>
-                      </a:solidFill>
-                    </a:lnB>
-                  </a:tcPr>
-                </a:tc>
-              </a:tr>
-              <a:tr h="173736">
-                <a:tc>
-                  <a:txBody>
-                    <a:bodyPr/>
-                    <a:lstStyle/>
-                    <a:p>
-                      <a:pPr algn="l"/>
-                      <a:r>
-                        <a:rPr lang="en-US" altLang="ko-KR" dirty="0" sz="700">
-                          <a:solidFill>
-                            <a:srgbClr val="262626"/>
-                          </a:solidFill>
-                          <a:latin typeface="Arial"/>
-                          <a:cs typeface="Arial"/>
-                        </a:rPr>
-                        <a:t>#02 rate/h*</a:t>
-                      </a:r>
-                    </a:p>
-                  </a:txBody>
-                  <a:tcPr marL="27432" marR="27432" marT="18288" marB="18288" anchor="ctr">
-                    <a:lnL w="6350">
-                      <a:solidFill>
-                        <a:srgbClr val="BFBFBF"/>
-                      </a:solidFill>
-                    </a:lnL>
-                    <a:lnR w="6350">
-                      <a:solidFill>
-                        <a:srgbClr val="BFBFBF"/>
-                      </a:solidFill>
-                    </a:lnR>
-                    <a:lnT w="6350">
-                      <a:solidFill>
-                        <a:srgbClr val="BFBFBF"/>
-                      </a:solidFill>
-                    </a:lnT>
-                    <a:lnB w="6350">
-                      <a:solidFill>
-                        <a:srgbClr val="BFBFBF"/>
-                      </a:solidFill>
-                    </a:lnB>
-                    <a:solidFill>
-                      <a:srgbClr val="F2F2F2"/>
-                    </a:solidFill>
-                  </a:tcPr>
-                </a:tc>
-                <a:tc>
-                  <a:txBody>
-                    <a:bodyPr/>
-                    <a:lstStyle/>
-                    <a:p>
-                      <a:pPr algn="ctr"/>
-                      <a:r>
-                        <a:rPr lang="en-US" altLang="ko-KR" dirty="0" sz="700">
-                          <a:solidFill>
-                            <a:srgbClr val="262626"/>
-                          </a:solidFill>
-                          <a:latin typeface="Arial"/>
-                          <a:cs typeface="Arial"/>
-                        </a:rPr>
-                        <a:t>379.5</a:t>
-                      </a:r>
-                    </a:p>
-                  </a:txBody>
-                  <a:tcPr marL="27432" marR="27432" marT="18288" marB="18288" anchor="ctr">
-                    <a:lnL w="6350">
-                      <a:solidFill>
-                        <a:srgbClr val="BFBFBF"/>
-                      </a:solidFill>
-                    </a:lnL>
-                    <a:lnR w="6350">
-                      <a:solidFill>
-                        <a:srgbClr val="BFBFBF"/>
-                      </a:solidFill>
-                    </a:lnR>
-                    <a:lnT w="6350">
-                      <a:solidFill>
-                        <a:srgbClr val="BFBFBF"/>
-                      </a:solidFill>
-                    </a:lnT>
-                    <a:lnB w="6350">
-                      <a:solidFill>
-                        <a:srgbClr val="BFBFBF"/>
-                      </a:solidFill>
-                    </a:lnB>
-                  </a:tcPr>
-                </a:tc>
-                <a:tc>
-                  <a:txBody>
-                    <a:bodyPr/>
-                    <a:lstStyle/>
-                    <a:p>
-                      <a:pPr algn="ctr"/>
-                      <a:r>
-                        <a:rPr lang="en-US" altLang="ko-KR" dirty="0" sz="700">
-                          <a:solidFill>
-                            <a:srgbClr val="262626"/>
-                          </a:solidFill>
-                          <a:latin typeface="Arial"/>
-                          <a:cs typeface="Arial"/>
-                        </a:rPr>
-                        <a:t>399.6</a:t>
-                      </a:r>
-                    </a:p>
-                  </a:txBody>
-                  <a:tcPr marL="27432" marR="27432" marT="18288" marB="18288" anchor="ctr">
-                    <a:lnL w="6350">
-                      <a:solidFill>
-                        <a:srgbClr val="BFBFBF"/>
-                      </a:solidFill>
-                    </a:lnL>
-                    <a:lnR w="6350">
-                      <a:solidFill>
-                        <a:srgbClr val="BFBFBF"/>
-                      </a:solidFill>
-                    </a:lnR>
-                    <a:lnT w="6350">
-                      <a:solidFill>
-                        <a:srgbClr val="BFBFBF"/>
-                      </a:solidFill>
-                    </a:lnT>
-                    <a:lnB w="6350">
-                      <a:solidFill>
-                        <a:srgbClr val="BFBFBF"/>
-                      </a:solidFill>
-                    </a:lnB>
-                  </a:tcPr>
-                </a:tc>
-                <a:tc>
-                  <a:txBody>
-                    <a:bodyPr/>
-                    <a:lstStyle/>
-                    <a:p>
-                      <a:pPr algn="ctr"/>
-                      <a:r>
-                        <a:rPr lang="en-US" altLang="ko-KR" dirty="0" sz="700" b="1">
-                          <a:solidFill>
-                            <a:srgbClr val="262626"/>
-                          </a:solidFill>
-                          <a:latin typeface="Arial"/>
-                          <a:cs typeface="Arial"/>
-                        </a:rPr>
-                        <a:t>441.4</a:t>
-                      </a:r>
-                    </a:p>
-                  </a:txBody>
-                  <a:tcPr marL="27432" marR="27432" marT="18288" marB="18288" anchor="ctr">
-                    <a:lnL w="6350">
-                      <a:solidFill>
-                        <a:srgbClr val="BFBFBF"/>
-                      </a:solidFill>
-                    </a:lnL>
-                    <a:lnR w="6350">
-                      <a:solidFill>
-                        <a:srgbClr val="BFBFBF"/>
-                      </a:solidFill>
-                    </a:lnR>
-                    <a:lnT w="6350">
-                      <a:solidFill>
-                        <a:srgbClr val="BFBFBF"/>
-                      </a:solidFill>
-                    </a:lnT>
-                    <a:lnB w="6350">
-                      <a:solidFill>
-                        <a:srgbClr val="BFBFBF"/>
-                      </a:solidFill>
-                    </a:lnB>
-                    <a:solidFill>
-                      <a:srgbClr val="EAF3EC"/>
-                    </a:solidFill>
-                  </a:tcPr>
-                </a:tc>
-                <a:tc>
-                  <a:txBody>
-                    <a:bodyPr/>
-                    <a:lstStyle/>
-                    <a:p>
-                      <a:pPr algn="ctr"/>
-                      <a:r>
-                        <a:rPr lang="en-US" altLang="ko-KR" dirty="0" sz="700" b="1">
-                          <a:solidFill>
-                            <a:srgbClr val="00703C"/>
-                          </a:solidFill>
-                          <a:latin typeface="Arial"/>
-                          <a:cs typeface="Arial"/>
-                        </a:rPr>
-                        <a:t>+16.3%</a:t>
-                      </a:r>
-                    </a:p>
-                  </a:txBody>
-                  <a:tcPr marL="27432" marR="27432" marT="18288" marB="18288" anchor="ctr">
-                    <a:lnL w="6350">
-                      <a:solidFill>
-                        <a:srgbClr val="BFBFBF"/>
-                      </a:solidFill>
-                    </a:lnL>
-                    <a:lnR w="6350">
-                      <a:solidFill>
-                        <a:srgbClr val="BFBFBF"/>
-                      </a:solidFill>
-                    </a:lnR>
-                    <a:lnT w="6350">
-                      <a:solidFill>
-                        <a:srgbClr val="BFBFBF"/>
-                      </a:solidFill>
-                    </a:lnT>
-                    <a:lnB w="6350">
-                      <a:solidFill>
-                        <a:srgbClr val="BFBFBF"/>
-                      </a:solidFill>
-                    </a:lnB>
-                  </a:tcPr>
-                </a:tc>
-              </a:tr>
-              <a:tr h="173736">
-                <a:tc>
-                  <a:txBody>
-                    <a:bodyPr/>
-                    <a:lstStyle/>
-                    <a:p>
-                      <a:pPr algn="l"/>
-                      <a:r>
-                        <a:rPr lang="en-US" altLang="ko-KR" dirty="0" sz="700">
-                          <a:solidFill>
-                            <a:srgbClr val="262626"/>
-                          </a:solidFill>
-                          <a:latin typeface="Arial"/>
-                          <a:cs typeface="Arial"/>
-                        </a:rPr>
-                        <a:t>Line per day</a:t>
-                      </a:r>
-                    </a:p>
-                  </a:txBody>
-                  <a:tcPr marL="27432" marR="27432" marT="18288" marB="18288" anchor="ctr">
-                    <a:lnL w="6350">
-                      <a:solidFill>
-                        <a:srgbClr val="BFBFBF"/>
-                      </a:solidFill>
-                    </a:lnL>
-                    <a:lnR w="6350">
-                      <a:solidFill>
-                        <a:srgbClr val="BFBFBF"/>
-                      </a:solidFill>
-                    </a:lnR>
-                    <a:lnT w="6350">
-                      <a:solidFill>
-                        <a:srgbClr val="BFBFBF"/>
-                      </a:solidFill>
-                    </a:lnT>
-                    <a:lnB w="6350">
-                      <a:solidFill>
-                        <a:srgbClr val="BFBFBF"/>
-                      </a:solidFill>
-                    </a:lnB>
-                    <a:solidFill>
-                      <a:srgbClr val="F2F2F2"/>
-                    </a:solidFill>
-                  </a:tcPr>
-                </a:tc>
-                <a:tc>
-                  <a:txBody>
-                    <a:bodyPr/>
-                    <a:lstStyle/>
-                    <a:p>
-                      <a:pPr algn="ctr"/>
-                      <a:r>
-                        <a:rPr lang="en-US" altLang="ko-KR" dirty="0" sz="700">
-                          <a:solidFill>
-                            <a:srgbClr val="262626"/>
-                          </a:solidFill>
-                          <a:latin typeface="Arial"/>
-                          <a:cs typeface="Arial"/>
-                        </a:rPr>
-                        <a:t>16,678</a:t>
-                      </a:r>
-                    </a:p>
-                  </a:txBody>
-                  <a:tcPr marL="27432" marR="27432" marT="18288" marB="18288" anchor="ctr">
-                    <a:lnL w="6350">
-                      <a:solidFill>
-                        <a:srgbClr val="BFBFBF"/>
-                      </a:solidFill>
-                    </a:lnL>
-                    <a:lnR w="6350">
-                      <a:solidFill>
-                        <a:srgbClr val="BFBFBF"/>
-                      </a:solidFill>
-                    </a:lnR>
-                    <a:lnT w="6350">
-                      <a:solidFill>
-                        <a:srgbClr val="BFBFBF"/>
-                      </a:solidFill>
-                    </a:lnT>
-                    <a:lnB w="6350">
-                      <a:solidFill>
-                        <a:srgbClr val="BFBFBF"/>
-                      </a:solidFill>
-                    </a:lnB>
-                  </a:tcPr>
-                </a:tc>
-                <a:tc>
-                  <a:txBody>
-                    <a:bodyPr/>
-                    <a:lstStyle/>
-                    <a:p>
-                      <a:pPr algn="ctr"/>
-                      <a:r>
-                        <a:rPr lang="en-US" altLang="ko-KR" dirty="0" sz="700">
-                          <a:solidFill>
-                            <a:srgbClr val="262626"/>
-                          </a:solidFill>
-                          <a:latin typeface="Arial"/>
-                          <a:cs typeface="Arial"/>
-                        </a:rPr>
-                        <a:t>17,449</a:t>
-                      </a:r>
-                    </a:p>
-                  </a:txBody>
-                  <a:tcPr marL="27432" marR="27432" marT="18288" marB="18288" anchor="ctr">
-                    <a:lnL w="6350">
-                      <a:solidFill>
-                        <a:srgbClr val="BFBFBF"/>
-                      </a:solidFill>
-                    </a:lnL>
-                    <a:lnR w="6350">
-                      <a:solidFill>
-                        <a:srgbClr val="BFBFBF"/>
-                      </a:solidFill>
-                    </a:lnR>
-                    <a:lnT w="6350">
-                      <a:solidFill>
-                        <a:srgbClr val="BFBFBF"/>
-                      </a:solidFill>
-                    </a:lnT>
-                    <a:lnB w="6350">
-                      <a:solidFill>
-                        <a:srgbClr val="BFBFBF"/>
-                      </a:solidFill>
-                    </a:lnB>
-                  </a:tcPr>
-                </a:tc>
-                <a:tc>
-                  <a:txBody>
-                    <a:bodyPr/>
-                    <a:lstStyle/>
-                    <a:p>
-                      <a:pPr algn="ctr"/>
-                      <a:r>
-                        <a:rPr lang="en-US" altLang="ko-KR" dirty="0" sz="700" b="1">
-                          <a:solidFill>
-                            <a:srgbClr val="262626"/>
-                          </a:solidFill>
-                          <a:latin typeface="Arial"/>
-                          <a:cs typeface="Arial"/>
-                        </a:rPr>
-                        <a:t>20,127</a:t>
-                      </a:r>
-                    </a:p>
-                  </a:txBody>
-                  <a:tcPr marL="27432" marR="27432" marT="18288" marB="18288" anchor="ctr">
-                    <a:lnL w="6350">
-                      <a:solidFill>
-                        <a:srgbClr val="BFBFBF"/>
-                      </a:solidFill>
-                    </a:lnL>
-                    <a:lnR w="6350">
-                      <a:solidFill>
-                        <a:srgbClr val="BFBFBF"/>
-                      </a:solidFill>
-                    </a:lnR>
-                    <a:lnT w="6350">
-                      <a:solidFill>
-                        <a:srgbClr val="BFBFBF"/>
-                      </a:solidFill>
-                    </a:lnT>
-                    <a:lnB w="6350">
-                      <a:solidFill>
-                        <a:srgbClr val="BFBFBF"/>
-                      </a:solidFill>
-                    </a:lnB>
-                    <a:solidFill>
-                      <a:srgbClr val="EAF3EC"/>
-                    </a:solidFill>
-                  </a:tcPr>
-                </a:tc>
-                <a:tc>
-                  <a:txBody>
-                    <a:bodyPr/>
-                    <a:lstStyle/>
-                    <a:p>
-                      <a:pPr algn="ctr"/>
-                      <a:r>
-                        <a:rPr lang="en-US" altLang="ko-KR" dirty="0" sz="700" b="1">
-                          <a:solidFill>
-                            <a:srgbClr val="00703C"/>
-                          </a:solidFill>
-                          <a:latin typeface="Arial"/>
-                          <a:cs typeface="Arial"/>
-                        </a:rPr>
-                        <a:t>+20.7%</a:t>
-                      </a:r>
-                    </a:p>
-                  </a:txBody>
-                  <a:tcPr marL="27432" marR="27432" marT="18288" marB="18288" anchor="ctr">
-                    <a:lnL w="6350">
-                      <a:solidFill>
-                        <a:srgbClr val="BFBFBF"/>
-                      </a:solidFill>
-                    </a:lnL>
-                    <a:lnR w="6350">
-                      <a:solidFill>
-                        <a:srgbClr val="BFBFBF"/>
-                      </a:solidFill>
-                    </a:lnR>
-                    <a:lnT w="6350">
-                      <a:solidFill>
-                        <a:srgbClr val="BFBFBF"/>
-                      </a:solidFill>
-                    </a:lnT>
-                    <a:lnB w="6350">
-                      <a:solidFill>
-                        <a:srgbClr val="BFBFBF"/>
-                      </a:solidFill>
-                    </a:lnB>
-                  </a:tcPr>
-                </a:tc>
-              </a:tr>
-            </a:tbl>
-          </a:graphicData>
-        </a:graphic>
-      </p:graphicFrame>
       <p:sp>
         <p:nvSpPr>
           <p:cNvPr id="302" name="Source note"/>
@@ -9952,7 +8425,7 @@
                   <a:srgbClr val="7F7F7F"/>
                 </a:solidFill>
               </a:rPr>
-              <a:t>* Run rate = average of hours without stops. Δ = 2 Oct vs 12 Aug. Source: hourly production report, TOP TLA Line 1. 1 Oct ran a tightly controlled material (05-07 h estimated). Results reflect all updates combined.</a:t>
+              <a:t>Effects measured directly on the stations during validation. Line output and alarm impact to be measured on Line 2 after formal release.</a:t>
             </a:r>
           </a:p>
         </p:txBody>
@@ -10146,7 +8619,7 @@
                 <a:latin typeface="Arial"/>
                 <a:cs typeface="Arial"/>
               </a:rPr>
-              <a:t>4 h</a:t>
+              <a:t>50014</a:t>
             </a:r>
           </a:p>
           <a:p>
@@ -10159,7 +8632,7 @@
                 <a:latin typeface="Arial"/>
                 <a:cs typeface="Arial"/>
               </a:rPr>
-              <a:t>#01 stops, 12 Aug</a:t>
+              <a:t>sporadic crashes, no trace</a:t>
             </a:r>
           </a:p>
         </p:txBody>
@@ -10537,6 +9010,342 @@
                 <a:cs typeface="Arial"/>
               </a:rPr>
               <a:t>Pallet released complete</a:t>
+            </a:r>
+          </a:p>
+        </p:txBody>
+      </p:sp>
+      <p:sp>
+        <p:nvSpPr>
+          <p:cNvPr id="415" name="Added box 415"/>
+          <p:cNvSpPr/>
+          <p:nvPr/>
+        </p:nvSpPr>
+        <p:spPr>
+          <a:xfrm>
+            <a:off x="7223760" y="3017520"/>
+            <a:ext cx="804672" cy="548640"/>
+          </a:xfrm>
+          <a:prstGeom prst="roundRect">
+            <a:avLst>
+              <a:gd name="adj" fmla="val 12000"/>
+            </a:avLst>
+          </a:prstGeom>
+          <a:solidFill>
+            <a:srgbClr val="F2F2F2"/>
+          </a:solidFill>
+          <a:ln w="6350">
+            <a:solidFill>
+              <a:srgbClr val="BFBFBF"/>
+            </a:solidFill>
+          </a:ln>
+        </p:spPr>
+        <p:txBody>
+          <a:bodyPr wrap="square" lIns="36000" tIns="18000" rIns="36000" bIns="18000" anchor="ctr"/>
+          <a:lstStyle/>
+          <a:p>
+            <a:pPr algn="ctr"/>
+            <a:r>
+              <a:rPr lang="en-US" altLang="ko-KR" dirty="0" sz="1050" b="1">
+                <a:solidFill>
+                  <a:srgbClr val="A50034"/>
+                </a:solidFill>
+                <a:latin typeface="Arial"/>
+                <a:cs typeface="Arial"/>
+              </a:rPr>
+              <a:t>Nearly all</a:t>
+            </a:r>
+          </a:p>
+          <a:p>
+            <a:pPr algn="ctr"/>
+            <a:r>
+              <a:rPr lang="en-US" altLang="ko-KR" dirty="0" sz="650">
+                <a:solidFill>
+                  <a:srgbClr val="404040"/>
+                </a:solidFill>
+                <a:latin typeface="Arial"/>
+                <a:cs typeface="Arial"/>
+              </a:rPr>
+              <a:t>pos. 12 missed before</a:t>
+            </a:r>
+          </a:p>
+        </p:txBody>
+      </p:sp>
+      <p:sp>
+        <p:nvSpPr>
+          <p:cNvPr id="416" name="Added box 416"/>
+          <p:cNvSpPr/>
+          <p:nvPr/>
+        </p:nvSpPr>
+        <p:spPr>
+          <a:xfrm>
+            <a:off x="8101583" y="3017520"/>
+            <a:ext cx="804672" cy="548640"/>
+          </a:xfrm>
+          <a:prstGeom prst="roundRect">
+            <a:avLst>
+              <a:gd name="adj" fmla="val 12000"/>
+            </a:avLst>
+          </a:prstGeom>
+          <a:solidFill>
+            <a:srgbClr val="F2F2F2"/>
+          </a:solidFill>
+          <a:ln w="6350">
+            <a:solidFill>
+              <a:srgbClr val="BFBFBF"/>
+            </a:solidFill>
+          </a:ln>
+        </p:spPr>
+        <p:txBody>
+          <a:bodyPr wrap="square" lIns="36000" tIns="18000" rIns="36000" bIns="18000" anchor="ctr"/>
+          <a:lstStyle/>
+          <a:p>
+            <a:pPr algn="ctr"/>
+            <a:r>
+              <a:rPr lang="en-US" altLang="ko-KR" dirty="0" sz="1050" b="1">
+                <a:solidFill>
+                  <a:srgbClr val="00703C"/>
+                </a:solidFill>
+                <a:latin typeface="Arial"/>
+                <a:cs typeface="Arial"/>
+              </a:rPr>
+              <a:t>0</a:t>
+            </a:r>
+          </a:p>
+          <a:p>
+            <a:pPr algn="ctr"/>
+            <a:r>
+              <a:rPr lang="en-US" altLang="ko-KR" dirty="0" sz="650">
+                <a:solidFill>
+                  <a:srgbClr val="404040"/>
+                </a:solidFill>
+                <a:latin typeface="Arial"/>
+                <a:cs typeface="Arial"/>
+              </a:rPr>
+              <a:t>validation shift</a:t>
+            </a:r>
+          </a:p>
+        </p:txBody>
+      </p:sp>
+      <p:sp>
+        <p:nvSpPr>
+          <p:cNvPr id="417" name="Added box 417"/>
+          <p:cNvSpPr/>
+          <p:nvPr/>
+        </p:nvSpPr>
+        <p:spPr>
+          <a:xfrm>
+            <a:off x="8979408" y="3017520"/>
+            <a:ext cx="804672" cy="548640"/>
+          </a:xfrm>
+          <a:prstGeom prst="roundRect">
+            <a:avLst>
+              <a:gd name="adj" fmla="val 12000"/>
+            </a:avLst>
+          </a:prstGeom>
+          <a:solidFill>
+            <a:srgbClr val="F2F2F2"/>
+          </a:solidFill>
+          <a:ln w="6350">
+            <a:solidFill>
+              <a:srgbClr val="BFBFBF"/>
+            </a:solidFill>
+          </a:ln>
+        </p:spPr>
+        <p:txBody>
+          <a:bodyPr wrap="square" lIns="36000" tIns="18000" rIns="36000" bIns="18000" anchor="ctr"/>
+          <a:lstStyle/>
+          <a:p>
+            <a:pPr algn="ctr"/>
+            <a:r>
+              <a:rPr lang="en-US" altLang="ko-KR" dirty="0" sz="1050" b="1">
+                <a:solidFill>
+                  <a:srgbClr val="00703C"/>
+                </a:solidFill>
+                <a:latin typeface="Arial"/>
+                <a:cs typeface="Arial"/>
+              </a:rPr>
+              <a:t>21</a:t>
+            </a:r>
+          </a:p>
+          <a:p>
+            <a:pPr algn="ctr"/>
+            <a:r>
+              <a:rPr lang="en-US" altLang="ko-KR" dirty="0" sz="650">
+                <a:solidFill>
+                  <a:srgbClr val="404040"/>
+                </a:solidFill>
+                <a:latin typeface="Arial"/>
+                <a:cs typeface="Arial"/>
+              </a:rPr>
+              <a:t>index guards</a:t>
+            </a:r>
+          </a:p>
+        </p:txBody>
+      </p:sp>
+      <p:sp>
+        <p:nvSpPr>
+          <p:cNvPr id="418" name="Added box 418"/>
+          <p:cNvSpPr/>
+          <p:nvPr/>
+        </p:nvSpPr>
+        <p:spPr>
+          <a:xfrm>
+            <a:off x="7223760" y="3639312"/>
+            <a:ext cx="1207008" cy="502920"/>
+          </a:xfrm>
+          <a:prstGeom prst="roundRect">
+            <a:avLst>
+              <a:gd name="adj" fmla="val 12000"/>
+            </a:avLst>
+          </a:prstGeom>
+          <a:solidFill>
+            <a:srgbClr val="F2F2F2"/>
+          </a:solidFill>
+          <a:ln w="6350">
+            <a:solidFill>
+              <a:srgbClr val="BFBFBF"/>
+            </a:solidFill>
+          </a:ln>
+        </p:spPr>
+        <p:txBody>
+          <a:bodyPr wrap="square" lIns="36000" tIns="18000" rIns="36000" bIns="18000" anchor="ctr"/>
+          <a:lstStyle/>
+          <a:p>
+            <a:pPr algn="ctr"/>
+            <a:r>
+              <a:rPr lang="en-US" altLang="ko-KR" dirty="0" sz="1100" b="1">
+                <a:solidFill>
+                  <a:srgbClr val="404040"/>
+                </a:solidFill>
+                <a:latin typeface="Arial"/>
+                <a:cs typeface="Arial"/>
+              </a:rPr>
+              <a:t>3 of 5</a:t>
+            </a:r>
+          </a:p>
+          <a:p>
+            <a:pPr algn="ctr"/>
+            <a:r>
+              <a:rPr lang="en-US" altLang="ko-KR" dirty="0" sz="650">
+                <a:solidFill>
+                  <a:srgbClr val="404040"/>
+                </a:solidFill>
+                <a:latin typeface="Arial"/>
+                <a:cs typeface="Arial"/>
+              </a:rPr>
+              <a:t>readings to raise 1211</a:t>
+            </a:r>
+          </a:p>
+        </p:txBody>
+      </p:sp>
+      <p:sp>
+        <p:nvSpPr>
+          <p:cNvPr id="419" name="Added box 419"/>
+          <p:cNvSpPr/>
+          <p:nvPr/>
+        </p:nvSpPr>
+        <p:spPr>
+          <a:xfrm>
+            <a:off x="8503920" y="3639312"/>
+            <a:ext cx="1207008" cy="502920"/>
+          </a:xfrm>
+          <a:prstGeom prst="roundRect">
+            <a:avLst>
+              <a:gd name="adj" fmla="val 12000"/>
+            </a:avLst>
+          </a:prstGeom>
+          <a:solidFill>
+            <a:srgbClr val="F2F2F2"/>
+          </a:solidFill>
+          <a:ln w="6350">
+            <a:solidFill>
+              <a:srgbClr val="BFBFBF"/>
+            </a:solidFill>
+          </a:ln>
+        </p:spPr>
+        <p:txBody>
+          <a:bodyPr wrap="square" lIns="36000" tIns="18000" rIns="36000" bIns="18000" anchor="ctr"/>
+          <a:lstStyle/>
+          <a:p>
+            <a:pPr algn="ctr"/>
+            <a:r>
+              <a:rPr lang="en-US" altLang="ko-KR" dirty="0" sz="1100" b="1">
+                <a:solidFill>
+                  <a:srgbClr val="404040"/>
+                </a:solidFill>
+                <a:latin typeface="Arial"/>
+                <a:cs typeface="Arial"/>
+              </a:rPr>
+              <a:t>150 ms</a:t>
+            </a:r>
+          </a:p>
+          <a:p>
+            <a:pPr algn="ctr"/>
+            <a:r>
+              <a:rPr lang="en-US" altLang="ko-KR" dirty="0" sz="650">
+                <a:solidFill>
+                  <a:srgbClr val="404040"/>
+                </a:solidFill>
+                <a:latin typeface="Arial"/>
+                <a:cs typeface="Arial"/>
+              </a:rPr>
+              <a:t>between readings</a:t>
+            </a:r>
+          </a:p>
+        </p:txBody>
+      </p:sp>
+      <p:sp>
+        <p:nvSpPr>
+          <p:cNvPr id="420" name="Added box 420"/>
+          <p:cNvSpPr/>
+          <p:nvPr/>
+        </p:nvSpPr>
+        <p:spPr>
+          <a:xfrm>
+            <a:off x="7223760" y="5705856"/>
+            <a:ext cx="2523744" cy="438912"/>
+          </a:xfrm>
+          <a:prstGeom prst="roundRect">
+            <a:avLst>
+              <a:gd name="adj" fmla="val 12000"/>
+            </a:avLst>
+          </a:prstGeom>
+          <a:solidFill>
+            <a:srgbClr val="F2F2F2"/>
+          </a:solidFill>
+          <a:ln w="6350">
+            <a:solidFill>
+              <a:srgbClr val="BFBFBF"/>
+            </a:solidFill>
+          </a:ln>
+        </p:spPr>
+        <p:txBody>
+          <a:bodyPr wrap="square" lIns="36000" tIns="18000" rIns="36000" bIns="18000" anchor="ctr"/>
+          <a:lstStyle/>
+          <a:p>
+            <a:pPr algn="l"/>
+            <a:r>
+              <a:rPr lang="en-US" altLang="ko-KR" dirty="0" sz="800" b="1">
+                <a:solidFill>
+                  <a:srgbClr val="404040"/>
+                </a:solidFill>
+                <a:latin typeface="Arial"/>
+                <a:cs typeface="Arial"/>
+              </a:rPr>
+              <a:t>Next step</a:t>
+            </a:r>
+          </a:p>
+          <a:p>
+            <a:pPr algn="l"/>
+            <a:r>
+              <a:rPr lang="en-US" altLang="ko-KR" dirty="0" sz="700">
+                <a:solidFill>
+                  <a:srgbClr val="404040"/>
+                </a:solidFill>
+                <a:latin typeface="Arial"/>
+                <a:cs typeface="Arial"/>
+              </a:rPr>
+              <a:t>Formal release on Line 2, then compare 1211 and 50014 alarm counts before vs after.</a:t>
             </a:r>
           </a:p>
         </p:txBody>
